--- a/Day31-GenAI-System-Evaluation/Day31_Deck_GenAI_System_Evaluation.pptx
+++ b/Day31-GenAI-System-Evaluation/Day31_Deck_GenAI_System_Evaluation.pptx
@@ -4765,13 +4765,13 @@
           <a:noFill/>
         </p:spPr>
         <p:txBody>
-          <a:bodyPr wrap="square" lIns="0" rIns="0" tIns="0" bIns="0" anchor="t">
-            <a:spAutoFit/>
-          </a:bodyPr>
-          <a:lstStyle/>
-          <a:p>
-            <a:r>
-              <a:rPr sz="1275" b="0" i="0">
+          <a:bodyPr wrap="none" lIns="0" rIns="0" tIns="0" bIns="0" anchor="t">
+            <a:spAutoFit/>
+          </a:bodyPr>
+          <a:lstStyle/>
+          <a:p>
+            <a:r>
+              <a:rPr sz="1122" b="0" i="0">
                 <a:solidFill>
                   <a:srgbClr val="EAF7F5"/>
                 </a:solidFill>
@@ -4782,7 +4782,7 @@
           </a:p>
           <a:p>
             <a:r>
-              <a:rPr sz="1275" b="0" i="0">
+              <a:rPr sz="1122" b="0" i="0">
                 <a:solidFill>
                   <a:srgbClr val="EAF7F5"/>
                 </a:solidFill>
@@ -4793,7 +4793,7 @@
           </a:p>
           <a:p>
             <a:r>
-              <a:rPr sz="1275" b="0" i="0">
+              <a:rPr sz="1122" b="0" i="0">
                 <a:solidFill>
                   <a:srgbClr val="EAF7F5"/>
                 </a:solidFill>
@@ -4804,7 +4804,7 @@
           </a:p>
           <a:p>
             <a:r>
-              <a:rPr sz="1275" b="0" i="0">
+              <a:rPr sz="1122" b="0" i="0">
                 <a:solidFill>
                   <a:srgbClr val="EAF7F5"/>
                 </a:solidFill>
@@ -4815,7 +4815,7 @@
           </a:p>
           <a:p>
             <a:r>
-              <a:rPr sz="1275" b="0" i="0">
+              <a:rPr sz="1122" b="0" i="0">
                 <a:solidFill>
                   <a:srgbClr val="EAF7F5"/>
                 </a:solidFill>
@@ -4826,7 +4826,7 @@
           </a:p>
           <a:p>
             <a:r>
-              <a:rPr sz="1275" b="0" i="0">
+              <a:rPr sz="1122" b="0" i="0">
                 <a:solidFill>
                   <a:srgbClr val="EAF7F5"/>
                 </a:solidFill>
@@ -4837,7 +4837,7 @@
           </a:p>
           <a:p>
             <a:r>
-              <a:rPr sz="1275" b="0" i="0">
+              <a:rPr sz="1122" b="0" i="0">
                 <a:solidFill>
                   <a:srgbClr val="EAF7F5"/>
                 </a:solidFill>
@@ -4848,7 +4848,7 @@
           </a:p>
           <a:p>
             <a:r>
-              <a:rPr sz="1275" b="0" i="0">
+              <a:rPr sz="1122" b="0" i="0">
                 <a:solidFill>
                   <a:srgbClr val="EAF7F5"/>
                 </a:solidFill>
@@ -4859,7 +4859,7 @@
           </a:p>
           <a:p>
             <a:r>
-              <a:rPr sz="1275" b="0" i="0">
+              <a:rPr sz="1122" b="0" i="0">
                 <a:solidFill>
                   <a:srgbClr val="EAF7F5"/>
                 </a:solidFill>
@@ -4870,7 +4870,7 @@
           </a:p>
           <a:p>
             <a:r>
-              <a:rPr sz="1275" b="0" i="0">
+              <a:rPr sz="1122" b="0" i="0">
                 <a:solidFill>
                   <a:srgbClr val="EAF7F5"/>
                 </a:solidFill>
@@ -5543,13 +5543,13 @@
           <a:noFill/>
         </p:spPr>
         <p:txBody>
-          <a:bodyPr wrap="square" lIns="0" rIns="0" tIns="0" bIns="0" anchor="t">
-            <a:spAutoFit/>
-          </a:bodyPr>
-          <a:lstStyle/>
-          <a:p>
-            <a:r>
-              <a:rPr sz="1400" b="0" i="0">
+          <a:bodyPr wrap="none" lIns="0" rIns="0" tIns="0" bIns="0" anchor="t">
+            <a:spAutoFit/>
+          </a:bodyPr>
+          <a:lstStyle/>
+          <a:p>
+            <a:r>
+              <a:rPr sz="1360" b="0" i="0">
                 <a:solidFill>
                   <a:srgbClr val="EAF7F5"/>
                 </a:solidFill>
@@ -5560,7 +5560,7 @@
           </a:p>
           <a:p>
             <a:r>
-              <a:rPr sz="1400" b="0" i="0">
+              <a:rPr sz="1360" b="0" i="0">
                 <a:solidFill>
                   <a:srgbClr val="EAF7F5"/>
                 </a:solidFill>
@@ -5571,7 +5571,7 @@
           </a:p>
           <a:p>
             <a:r>
-              <a:rPr sz="1400" b="0" i="0">
+              <a:rPr sz="1360" b="0" i="0">
                 <a:solidFill>
                   <a:srgbClr val="EAF7F5"/>
                 </a:solidFill>
@@ -5582,7 +5582,7 @@
           </a:p>
           <a:p>
             <a:r>
-              <a:rPr sz="1400" b="0" i="0">
+              <a:rPr sz="1360" b="0" i="0">
                 <a:solidFill>
                   <a:srgbClr val="EAF7F5"/>
                 </a:solidFill>
@@ -5593,7 +5593,7 @@
           </a:p>
           <a:p>
             <a:r>
-              <a:rPr sz="1400" b="0" i="0">
+              <a:rPr sz="1360" b="0" i="0">
                 <a:solidFill>
                   <a:srgbClr val="EAF7F5"/>
                 </a:solidFill>
@@ -5604,7 +5604,7 @@
           </a:p>
           <a:p>
             <a:r>
-              <a:rPr sz="1400" b="0" i="0">
+              <a:rPr sz="1360" b="0" i="0">
                 <a:solidFill>
                   <a:srgbClr val="EAF7F5"/>
                 </a:solidFill>
@@ -10978,13 +10978,13 @@
           <a:noFill/>
         </p:spPr>
         <p:txBody>
-          <a:bodyPr wrap="square" lIns="0" rIns="0" tIns="0" bIns="0" anchor="t">
-            <a:spAutoFit/>
-          </a:bodyPr>
-          <a:lstStyle/>
-          <a:p>
-            <a:r>
-              <a:rPr sz="1400" b="0" i="0">
+          <a:bodyPr wrap="none" lIns="0" rIns="0" tIns="0" bIns="0" anchor="t">
+            <a:spAutoFit/>
+          </a:bodyPr>
+          <a:lstStyle/>
+          <a:p>
+            <a:r>
+              <a:rPr sz="1320" b="0" i="0">
                 <a:solidFill>
                   <a:srgbClr val="EAF7F5"/>
                 </a:solidFill>
@@ -10995,7 +10995,7 @@
           </a:p>
           <a:p>
             <a:r>
-              <a:rPr sz="1400" b="0" i="0">
+              <a:rPr sz="1320" b="0" i="0">
                 <a:solidFill>
                   <a:srgbClr val="EAF7F5"/>
                 </a:solidFill>
@@ -11006,7 +11006,7 @@
           </a:p>
           <a:p>
             <a:r>
-              <a:rPr sz="1400" b="0" i="0">
+              <a:rPr sz="1320" b="0" i="0">
                 <a:solidFill>
                   <a:srgbClr val="EAF7F5"/>
                 </a:solidFill>
@@ -11017,7 +11017,7 @@
           </a:p>
           <a:p>
             <a:r>
-              <a:rPr sz="1400" b="0" i="0">
+              <a:rPr sz="1320" b="0" i="0">
                 <a:solidFill>
                   <a:srgbClr val="EAF7F5"/>
                 </a:solidFill>
@@ -11028,7 +11028,7 @@
           </a:p>
           <a:p>
             <a:r>
-              <a:rPr sz="1400" b="0" i="0">
+              <a:rPr sz="1320" b="0" i="0">
                 <a:solidFill>
                   <a:srgbClr val="EAF7F5"/>
                 </a:solidFill>
@@ -11039,7 +11039,7 @@
           </a:p>
           <a:p>
             <a:r>
-              <a:rPr sz="1400" b="0" i="0">
+              <a:rPr sz="1320" b="0" i="0">
                 <a:solidFill>
                   <a:srgbClr val="EAF7F5"/>
                 </a:solidFill>
@@ -11050,7 +11050,7 @@
           </a:p>
           <a:p>
             <a:r>
-              <a:rPr sz="1400" b="0" i="0">
+              <a:rPr sz="1320" b="0" i="0">
                 <a:solidFill>
                   <a:srgbClr val="EAF7F5"/>
                 </a:solidFill>
